--- a/student presentation template.pptx
+++ b/student presentation template.pptx
@@ -743,7 +743,7 @@
         </p:nvSpPr>
         <p:spPr>
           <a:xfrm>
-            <a:off x="381300" y="685800"/>
+            <a:off x="381000" y="685800"/>
             <a:ext cx="6096000" cy="3429000"/>
           </a:xfrm>
           <a:custGeom>
@@ -847,7 +847,7 @@
         </p:nvSpPr>
         <p:spPr>
           <a:xfrm>
-            <a:off x="381300" y="685800"/>
+            <a:off x="381000" y="685800"/>
             <a:ext cx="6096000" cy="3429000"/>
           </a:xfrm>
           <a:custGeom>
@@ -951,7 +951,7 @@
         </p:nvSpPr>
         <p:spPr>
           <a:xfrm>
-            <a:off x="381300" y="685800"/>
+            <a:off x="381000" y="685800"/>
             <a:ext cx="6096000" cy="3429000"/>
           </a:xfrm>
           <a:custGeom>
@@ -1575,7 +1575,7 @@
         </p:nvSpPr>
         <p:spPr>
           <a:xfrm>
-            <a:off x="381300" y="685800"/>
+            <a:off x="381000" y="685800"/>
             <a:ext cx="6096000" cy="3429000"/>
           </a:xfrm>
           <a:custGeom>
@@ -1679,7 +1679,7 @@
         </p:nvSpPr>
         <p:spPr>
           <a:xfrm>
-            <a:off x="381300" y="685800"/>
+            <a:off x="381000" y="685800"/>
             <a:ext cx="6096000" cy="3429000"/>
           </a:xfrm>
           <a:custGeom>
@@ -6980,7 +6980,7 @@
         <p:spPr>
           <a:xfrm>
             <a:off x="311700" y="855450"/>
-            <a:ext cx="8520600" cy="841800"/>
+            <a:ext cx="8520600" cy="3097118"/>
           </a:xfrm>
           <a:prstGeom prst="rect">
             <a:avLst/>
@@ -7002,17 +7002,30 @@
               <a:buNone/>
             </a:pPr>
             <a:r>
-              <a:rPr lang="en" b="1"/>
+              <a:rPr lang="en" b="1" dirty="0"/>
               <a:t>Download this slide show and</a:t>
             </a:r>
             <a:br>
-              <a:rPr lang="en" b="1"/>
+              <a:rPr lang="en" b="1" dirty="0"/>
             </a:br>
             <a:r>
-              <a:rPr lang="en" b="1"/>
+              <a:rPr lang="en" b="1" dirty="0"/>
               <a:t>work on your own copy!</a:t>
             </a:r>
-            <a:endParaRPr b="1"/>
+            <a:br>
+              <a:rPr lang="en" b="1" dirty="0"/>
+            </a:br>
+            <a:br>
+              <a:rPr lang="en" b="1" dirty="0"/>
+            </a:br>
+            <a:r>
+              <a:rPr lang="en" b="1" i="1" dirty="0"/>
+              <a:t>(consult slides 2-6, but delete slides 1-6 from your final presentation)</a:t>
+            </a:r>
+            <a:br>
+              <a:rPr lang="en" b="1" dirty="0"/>
+            </a:br>
+            <a:endParaRPr b="1" dirty="0"/>
           </a:p>
         </p:txBody>
       </p:sp>
@@ -7170,7 +7183,7 @@
         </p:blipFill>
         <p:spPr>
           <a:xfrm>
-            <a:off x="311692" y="1152475"/>
+            <a:off x="0" y="1017725"/>
             <a:ext cx="5528711" cy="3416400"/>
           </a:xfrm>
           <a:prstGeom prst="rect">
@@ -7355,7 +7368,7 @@
         </p:blipFill>
         <p:spPr>
           <a:xfrm>
-            <a:off x="311711" y="1152475"/>
+            <a:off x="311675" y="1017725"/>
             <a:ext cx="4971614" cy="3551150"/>
           </a:xfrm>
           <a:prstGeom prst="rect">
@@ -7469,10 +7482,10 @@
               <a:buNone/>
             </a:pPr>
             <a:r>
-              <a:rPr lang="en"/>
+              <a:rPr lang="en" dirty="0"/>
               <a:t>(from your species distribution model)</a:t>
             </a:r>
-            <a:endParaRPr/>
+            <a:endParaRPr dirty="0"/>
           </a:p>
         </p:txBody>
       </p:sp>
@@ -7818,10 +7831,18 @@
               <a:buNone/>
             </a:pPr>
             <a:r>
-              <a:rPr lang="en"/>
-              <a:t>(Instructor notes - not included in presentation)</a:t>
-            </a:r>
-            <a:endParaRPr/>
+              <a:rPr lang="en" dirty="0"/>
+              <a:t>Instructor notes (</a:t>
+            </a:r>
+            <a:r>
+              <a:rPr lang="en" i="1" dirty="0"/>
+              <a:t>do not include in presentation</a:t>
+            </a:r>
+            <a:r>
+              <a:rPr lang="en" dirty="0"/>
+              <a:t>)</a:t>
+            </a:r>
+            <a:endParaRPr dirty="0"/>
           </a:p>
         </p:txBody>
       </p:sp>
@@ -8167,20 +8188,20 @@
           </a:bodyPr>
           <a:lstStyle/>
           <a:p>
-            <a:pPr marL="0" lvl="0" indent="0" algn="l" rtl="0">
-              <a:spcBef>
-                <a:spcPts val="0"/>
-              </a:spcBef>
-              <a:spcAft>
-                <a:spcPts val="0"/>
-              </a:spcAft>
-              <a:buNone/>
-            </a:pPr>
-            <a:r>
-              <a:rPr lang="en"/>
-              <a:t>(Guidelines for library work - not included in presentation)</a:t>
-            </a:r>
-            <a:endParaRPr/>
+            <a:pPr lvl="0"/>
+            <a:r>
+              <a:rPr lang="en" dirty="0"/>
+              <a:t>Guidelines for library work (</a:t>
+            </a:r>
+            <a:r>
+              <a:rPr lang="en" i="1" dirty="0"/>
+              <a:t>do not include in presentation</a:t>
+            </a:r>
+            <a:r>
+              <a:rPr lang="en" dirty="0"/>
+              <a:t>)</a:t>
+            </a:r>
+            <a:endParaRPr dirty="0"/>
           </a:p>
         </p:txBody>
       </p:sp>
@@ -8659,20 +8680,16 @@
           </a:bodyPr>
           <a:lstStyle/>
           <a:p>
-            <a:pPr marL="0" lvl="0" indent="0" algn="l" rtl="0">
-              <a:spcBef>
-                <a:spcPts val="0"/>
-              </a:spcBef>
-              <a:spcAft>
-                <a:spcPts val="0"/>
-              </a:spcAft>
-              <a:buNone/>
-            </a:pPr>
-            <a:r>
-              <a:rPr lang="en"/>
-              <a:t>Interesting related websites (for if you’re done &amp; bored)</a:t>
-            </a:r>
-            <a:endParaRPr/>
+            <a:pPr lvl="0"/>
+            <a:r>
+              <a:rPr lang="en" dirty="0"/>
+              <a:t>Interesting related websites (for if you finish early and want to explore more) - </a:t>
+            </a:r>
+            <a:r>
+              <a:rPr lang="en" i="1" dirty="0"/>
+              <a:t>do not include in presentation</a:t>
+            </a:r>
+            <a:endParaRPr i="1" dirty="0"/>
           </a:p>
         </p:txBody>
       </p:sp>
@@ -8688,7 +8705,7 @@
         </p:nvSpPr>
         <p:spPr>
           <a:xfrm>
-            <a:off x="311700" y="1152475"/>
+            <a:off x="311700" y="1401300"/>
             <a:ext cx="8520600" cy="3742200"/>
           </a:xfrm>
           <a:prstGeom prst="rect">
@@ -9149,7 +9166,7 @@
         </p:nvSpPr>
         <p:spPr>
           <a:xfrm>
-            <a:off x="311700" y="1152475"/>
+            <a:off x="311700" y="1401300"/>
             <a:ext cx="8520600" cy="3742200"/>
           </a:xfrm>
           <a:prstGeom prst="rect">
@@ -9534,20 +9551,20 @@
           </a:bodyPr>
           <a:lstStyle/>
           <a:p>
-            <a:pPr marL="0" lvl="0" indent="0" algn="l" rtl="0">
-              <a:spcBef>
-                <a:spcPts val="0"/>
-              </a:spcBef>
-              <a:spcAft>
-                <a:spcPts val="0"/>
-              </a:spcAft>
-              <a:buNone/>
-            </a:pPr>
-            <a:r>
-              <a:rPr lang="en"/>
-              <a:t>Other related resources for further study</a:t>
-            </a:r>
-            <a:endParaRPr/>
+            <a:pPr lvl="0"/>
+            <a:r>
+              <a:rPr lang="en" dirty="0"/>
+              <a:t>Other related resources for further study (</a:t>
+            </a:r>
+            <a:r>
+              <a:rPr lang="en" i="1" dirty="0"/>
+              <a:t>do not include in presentation</a:t>
+            </a:r>
+            <a:r>
+              <a:rPr lang="en" dirty="0"/>
+              <a:t>)</a:t>
+            </a:r>
+            <a:endParaRPr dirty="0"/>
           </a:p>
         </p:txBody>
       </p:sp>
@@ -9843,18 +9860,18 @@
           </a:bodyPr>
           <a:lstStyle/>
           <a:p>
-            <a:pPr marL="0" lvl="0" indent="0" algn="l" rtl="0">
-              <a:spcBef>
-                <a:spcPts val="0"/>
-              </a:spcBef>
-              <a:spcAft>
-                <a:spcPts val="0"/>
-              </a:spcAft>
-              <a:buNone/>
-            </a:pPr>
+            <a:pPr lvl="0"/>
             <a:r>
               <a:rPr lang="en" dirty="0"/>
-              <a:t>Using the slide template</a:t>
+              <a:t>Using the slide template (</a:t>
+            </a:r>
+            <a:r>
+              <a:rPr lang="en" i="1" dirty="0"/>
+              <a:t>do not include in presentation</a:t>
+            </a:r>
+            <a:r>
+              <a:rPr lang="en" dirty="0"/>
+              <a:t>)</a:t>
             </a:r>
             <a:endParaRPr dirty="0"/>
           </a:p>
@@ -10174,10 +10191,10 @@
               <a:buNone/>
             </a:pPr>
             <a:r>
-              <a:rPr lang="en"/>
-              <a:t>picture</a:t>
-            </a:r>
-            <a:endParaRPr/>
+              <a:rPr lang="en" dirty="0"/>
+              <a:t>add a picture</a:t>
+            </a:r>
+            <a:endParaRPr dirty="0"/>
           </a:p>
         </p:txBody>
       </p:sp>
@@ -10425,20 +10442,12 @@
           </a:bodyPr>
           <a:lstStyle/>
           <a:p>
-            <a:pPr marL="0" lvl="0" indent="0" algn="ctr" rtl="0">
-              <a:spcBef>
-                <a:spcPts val="0"/>
-              </a:spcBef>
-              <a:spcAft>
-                <a:spcPts val="0"/>
-              </a:spcAft>
-              <a:buNone/>
-            </a:pPr>
-            <a:r>
-              <a:rPr lang="en"/>
-              <a:t>more pictures</a:t>
-            </a:r>
-            <a:endParaRPr/>
+            <a:pPr lvl="0" algn="ctr"/>
+            <a:r>
+              <a:rPr lang="en" dirty="0"/>
+              <a:t>add more pictures</a:t>
+            </a:r>
+            <a:endParaRPr dirty="0"/>
           </a:p>
         </p:txBody>
       </p:sp>
